--- a/templates/Track_Record_Anonymised_TEMPLATE.pptx
+++ b/templates/Track_Record_Anonymised_TEMPLATE.pptx
@@ -6,8 +6,8 @@
   </p:sldMasterIdLst>
   <p:sldIdLst>
     <p:sldId id="4526" r:id="rId5"/>
-    <p:sldId id="5825" r:id="rId7"/>
-    <p:sldId id="4334" r:id="rId8"/>
+    <p:sldId id="5825" r:id="rId6"/>
+    <p:sldId id="4334" r:id="rId7"/>
   </p:sldIdLst>
   <p:sldSz cx="12192000" cy="6858000"/>
   <p:notesSz cx="6858000" cy="9144000"/>
@@ -8816,7 +8816,7 @@
 </p:sld>
 </file>
 
-<file path=ppt/slides/slide3.xml><?xml version="1.0" encoding="utf-8"?>
+<file path=ppt/slides/slide2.xml><?xml version="1.0" encoding="utf-8"?>
 <p:sld xmlns:a="http://schemas.openxmlformats.org/drawingml/2006/main" xmlns:r="http://schemas.openxmlformats.org/officeDocument/2006/relationships" xmlns:p="http://schemas.openxmlformats.org/presentationml/2006/main">
   <p:cSld>
     <p:spTree>
@@ -9130,7 +9130,7 @@
 </p:sld>
 </file>
 
-<file path=ppt/slides/slide4.xml><?xml version="1.0" encoding="utf-8"?>
+<file path=ppt/slides/slide3.xml><?xml version="1.0" encoding="utf-8"?>
 <p:sld xmlns:a="http://schemas.openxmlformats.org/drawingml/2006/main" xmlns:r="http://schemas.openxmlformats.org/officeDocument/2006/relationships" xmlns:p="http://schemas.openxmlformats.org/presentationml/2006/main">
   <p:cSld>
     <p:spTree>
@@ -9224,7 +9224,7 @@
         </p:nvSpPr>
         <p:spPr>
           <a:xfrm>
-            <a:off x="9936871" y="880533"/>
+            <a:off x="9936871" y="1045125"/>
             <a:ext cx="2200000" cy="245534"/>
           </a:xfrm>
           <a:prstGeom prst="rect">
@@ -11963,7 +11963,7 @@
         </p:nvSpPr>
         <p:spPr>
           <a:xfrm>
-            <a:off x="10296140" y="1233741"/>
+            <a:off x="10296140" y="1480629"/>
             <a:ext cx="1332387" cy="502460"/>
           </a:xfrm>
           <a:prstGeom prst="rect">
@@ -12017,7 +12017,7 @@
         </p:nvSpPr>
         <p:spPr>
           <a:xfrm>
-            <a:off x="10296140" y="1960372"/>
+            <a:off x="10296140" y="2167636"/>
             <a:ext cx="1332387" cy="502460"/>
           </a:xfrm>
           <a:prstGeom prst="rect">
@@ -12071,7 +12071,7 @@
         </p:nvSpPr>
         <p:spPr>
           <a:xfrm>
-            <a:off x="10296140" y="2687003"/>
+            <a:off x="10296140" y="2854643"/>
             <a:ext cx="1332387" cy="502460"/>
           </a:xfrm>
           <a:prstGeom prst="rect">
@@ -12125,7 +12125,7 @@
         </p:nvSpPr>
         <p:spPr>
           <a:xfrm>
-            <a:off x="10296140" y="3413635"/>
+            <a:off x="10296140" y="3541650"/>
             <a:ext cx="1332387" cy="502460"/>
           </a:xfrm>
           <a:prstGeom prst="rect">
@@ -12179,7 +12179,7 @@
         </p:nvSpPr>
         <p:spPr>
           <a:xfrm>
-            <a:off x="10296140" y="4140266"/>
+            <a:off x="10296140" y="4228657"/>
             <a:ext cx="1332387" cy="502460"/>
           </a:xfrm>
           <a:prstGeom prst="rect">
@@ -12233,7 +12233,7 @@
         </p:nvSpPr>
         <p:spPr>
           <a:xfrm>
-            <a:off x="10296140" y="4866897"/>
+            <a:off x="10296140" y="4915664"/>
             <a:ext cx="1332387" cy="502460"/>
           </a:xfrm>
           <a:prstGeom prst="rect">
@@ -12287,7 +12287,7 @@
         </p:nvSpPr>
         <p:spPr>
           <a:xfrm>
-            <a:off x="10296140" y="5593529"/>
+            <a:off x="10296140" y="5602673"/>
             <a:ext cx="1332387" cy="502460"/>
           </a:xfrm>
           <a:prstGeom prst="rect">
@@ -12674,6 +12674,28 @@
 </file>
 
 <file path=customXml/item1.xml><?xml version="1.0" encoding="utf-8"?>
+<?mso-contentType ?>
+<FormTemplates xmlns="http://schemas.microsoft.com/sharepoint/v3/contenttype/forms">
+  <Display>DocumentLibraryForm</Display>
+  <Edit>DocumentLibraryForm</Edit>
+  <New>DocumentLibraryForm</New>
+</FormTemplates>
+</file>
+
+<file path=customXml/item2.xml><?xml version="1.0" encoding="utf-8"?>
+<p:properties xmlns:p="http://schemas.microsoft.com/office/2006/metadata/properties" xmlns:xsi="http://www.w3.org/2001/XMLSchema-instance" xmlns:pc="http://schemas.microsoft.com/office/infopath/2007/PartnerControls">
+  <documentManagement>
+    <TaxCatchAll xmlns="8fe6d124-157e-4db3-accf-90154e53f67d" xsi:nil="true"/>
+    <_ip_UnifiedCompliancePolicyUIAction xmlns="http://schemas.microsoft.com/sharepoint/v3" xsi:nil="true"/>
+    <lcf76f155ced4ddcb4097134ff3c332f xmlns="c59d7448-2016-48ac-8116-1a263a71d5c2">
+      <Terms xmlns="http://schemas.microsoft.com/office/infopath/2007/PartnerControls"/>
+    </lcf76f155ced4ddcb4097134ff3c332f>
+    <_ip_UnifiedCompliancePolicyProperties xmlns="http://schemas.microsoft.com/sharepoint/v3" xsi:nil="true"/>
+  </documentManagement>
+</p:properties>
+</file>
+
+<file path=customXml/item3.xml><?xml version="1.0" encoding="utf-8"?>
 <ct:contentTypeSchema xmlns:ct="http://schemas.microsoft.com/office/2006/metadata/contentType" xmlns:ma="http://schemas.microsoft.com/office/2006/metadata/properties/metaAttributes" ct:_="" ma:_="" ma:contentTypeName="Document" ma:contentTypeID="0x010100D8B187BE3B3AEC4AB8674E2C30249C78" ma:contentTypeVersion="26" ma:contentTypeDescription="Create a new document." ma:contentTypeScope="" ma:versionID="a6bb2971ac57d20158ebc689397b4758">
   <xsd:schema xmlns:xsd="http://www.w3.org/2001/XMLSchema" xmlns:xs="http://www.w3.org/2001/XMLSchema" xmlns:p="http://schemas.microsoft.com/office/2006/metadata/properties" xmlns:ns1="http://schemas.microsoft.com/sharepoint/v3" xmlns:ns2="8fe6d124-157e-4db3-accf-90154e53f67d" xmlns:ns3="c59d7448-2016-48ac-8116-1a263a71d5c2" targetNamespace="http://schemas.microsoft.com/office/2006/metadata/properties" ma:root="true" ma:fieldsID="8a5a5e648fbb586fb833005c4f0aa645" ns1:_="" ns2:_="" ns3:_="">
     <xsd:import namespace="http://schemas.microsoft.com/sharepoint/v3"/>
@@ -12965,44 +12987,10 @@
 </ct:contentTypeSchema>
 </file>
 
-<file path=customXml/item2.xml><?xml version="1.0" encoding="utf-8"?>
-<p:properties xmlns:p="http://schemas.microsoft.com/office/2006/metadata/properties" xmlns:xsi="http://www.w3.org/2001/XMLSchema-instance" xmlns:pc="http://schemas.microsoft.com/office/infopath/2007/PartnerControls">
-  <documentManagement>
-    <TaxCatchAll xmlns="8fe6d124-157e-4db3-accf-90154e53f67d" xsi:nil="true"/>
-    <_ip_UnifiedCompliancePolicyUIAction xmlns="http://schemas.microsoft.com/sharepoint/v3" xsi:nil="true"/>
-    <lcf76f155ced4ddcb4097134ff3c332f xmlns="c59d7448-2016-48ac-8116-1a263a71d5c2">
-      <Terms xmlns="http://schemas.microsoft.com/office/infopath/2007/PartnerControls"/>
-    </lcf76f155ced4ddcb4097134ff3c332f>
-    <_ip_UnifiedCompliancePolicyProperties xmlns="http://schemas.microsoft.com/sharepoint/v3" xsi:nil="true"/>
-  </documentManagement>
-</p:properties>
-</file>
-
-<file path=customXml/item3.xml><?xml version="1.0" encoding="utf-8"?>
-<?mso-contentType ?>
-<FormTemplates xmlns="http://schemas.microsoft.com/sharepoint/v3/contenttype/forms">
-  <Display>DocumentLibraryForm</Display>
-  <Edit>DocumentLibraryForm</Edit>
-  <New>DocumentLibraryForm</New>
-</FormTemplates>
-</file>
-
 <file path=customXml/itemProps1.xml><?xml version="1.0" encoding="utf-8"?>
-<ds:datastoreItem xmlns:ds="http://schemas.openxmlformats.org/officeDocument/2006/customXml" ds:itemID="{13CBA836-B929-434D-AC9F-DAA2E4FFF50E}">
+<ds:datastoreItem xmlns:ds="http://schemas.openxmlformats.org/officeDocument/2006/customXml" ds:itemID="{D42AFD60-4E8B-4112-8011-F9EE9D0B2439}">
   <ds:schemaRefs>
-    <ds:schemaRef ds:uri="http://schemas.microsoft.com/office/2006/metadata/contentType"/>
-    <ds:schemaRef ds:uri="http://schemas.microsoft.com/office/2006/metadata/properties/metaAttributes"/>
-    <ds:schemaRef ds:uri="http://www.w3.org/2001/XMLSchema"/>
-    <ds:schemaRef ds:uri="http://schemas.microsoft.com/office/2006/metadata/properties"/>
-    <ds:schemaRef ds:uri="http://schemas.microsoft.com/sharepoint/v3"/>
-    <ds:schemaRef ds:uri="8fe6d124-157e-4db3-accf-90154e53f67d"/>
-    <ds:schemaRef ds:uri="c59d7448-2016-48ac-8116-1a263a71d5c2"/>
-    <ds:schemaRef ds:uri="http://schemas.microsoft.com/office/2006/documentManagement/types"/>
-    <ds:schemaRef ds:uri="http://schemas.microsoft.com/office/infopath/2007/PartnerControls"/>
-    <ds:schemaRef ds:uri="http://schemas.openxmlformats.org/package/2006/metadata/core-properties"/>
-    <ds:schemaRef ds:uri="http://purl.org/dc/elements/1.1/"/>
-    <ds:schemaRef ds:uri="http://purl.org/dc/terms/"/>
-    <ds:schemaRef ds:uri="http://schemas.microsoft.com/internal/obd"/>
+    <ds:schemaRef ds:uri="http://schemas.microsoft.com/sharepoint/v3/contenttype/forms"/>
   </ds:schemaRefs>
 </ds:datastoreItem>
 </file>
@@ -13026,9 +13014,21 @@
 </file>
 
 <file path=customXml/itemProps3.xml><?xml version="1.0" encoding="utf-8"?>
-<ds:datastoreItem xmlns:ds="http://schemas.openxmlformats.org/officeDocument/2006/customXml" ds:itemID="{D42AFD60-4E8B-4112-8011-F9EE9D0B2439}">
+<ds:datastoreItem xmlns:ds="http://schemas.openxmlformats.org/officeDocument/2006/customXml" ds:itemID="{13CBA836-B929-434D-AC9F-DAA2E4FFF50E}">
   <ds:schemaRefs>
-    <ds:schemaRef ds:uri="http://schemas.microsoft.com/sharepoint/v3/contenttype/forms"/>
+    <ds:schemaRef ds:uri="http://schemas.microsoft.com/office/2006/metadata/contentType"/>
+    <ds:schemaRef ds:uri="http://schemas.microsoft.com/office/2006/metadata/properties/metaAttributes"/>
+    <ds:schemaRef ds:uri="http://www.w3.org/2001/XMLSchema"/>
+    <ds:schemaRef ds:uri="http://schemas.microsoft.com/office/2006/metadata/properties"/>
+    <ds:schemaRef ds:uri="http://schemas.microsoft.com/sharepoint/v3"/>
+    <ds:schemaRef ds:uri="8fe6d124-157e-4db3-accf-90154e53f67d"/>
+    <ds:schemaRef ds:uri="c59d7448-2016-48ac-8116-1a263a71d5c2"/>
+    <ds:schemaRef ds:uri="http://schemas.microsoft.com/office/2006/documentManagement/types"/>
+    <ds:schemaRef ds:uri="http://schemas.microsoft.com/office/infopath/2007/PartnerControls"/>
+    <ds:schemaRef ds:uri="http://schemas.openxmlformats.org/package/2006/metadata/core-properties"/>
+    <ds:schemaRef ds:uri="http://purl.org/dc/elements/1.1/"/>
+    <ds:schemaRef ds:uri="http://purl.org/dc/terms/"/>
+    <ds:schemaRef ds:uri="http://schemas.microsoft.com/internal/obd"/>
   </ds:schemaRefs>
 </ds:datastoreItem>
 </file>